--- a/我對你的愛永不變.pptx
+++ b/我對你的愛永不變.pptx
@@ -5,8 +5,11 @@
     <p:sldMasterId id="2147483660" r:id="rId1"/>
   </p:sldMasterIdLst>
   <p:sldIdLst>
-    <p:sldId id="257" r:id="rId2"/>
-    <p:sldId id="258" r:id="rId3"/>
+    <p:sldId id="353" r:id="rId2"/>
+    <p:sldId id="390" r:id="rId3"/>
+    <p:sldId id="684" r:id="rId4"/>
+    <p:sldId id="685" r:id="rId5"/>
+    <p:sldId id="686" r:id="rId6"/>
   </p:sldIdLst>
   <p:sldSz cx="12192000" cy="6858000"/>
   <p:notesSz cx="6858000" cy="9144000"/>
@@ -162,10 +165,9 @@
           <a:lstStyle/>
           <a:p>
             <a:r>
-              <a:rPr lang="zh-TW" altLang="en-US" smtClean="0"/>
+              <a:rPr lang="zh-TW" altLang="en-US"/>
               <a:t>按一下以編輯母片標題樣式</a:t>
             </a:r>
-            <a:endParaRPr lang="zh-TW" altLang="en-US"/>
           </a:p>
         </p:txBody>
       </p:sp>
@@ -281,10 +283,9 @@
           </a:lstStyle>
           <a:p>
             <a:r>
-              <a:rPr lang="zh-TW" altLang="en-US" smtClean="0"/>
+              <a:rPr lang="zh-TW" altLang="en-US"/>
               <a:t>按一下以編輯母片副標題樣式</a:t>
             </a:r>
-            <a:endParaRPr lang="zh-TW" altLang="en-US"/>
           </a:p>
         </p:txBody>
       </p:sp>
@@ -306,7 +307,7 @@
             <a:fld id="{34984126-158D-41CC-83FE-CADDC65CCDDB}" type="datetimeFigureOut">
               <a:rPr lang="zh-TW" altLang="en-US" smtClean="0"/>
               <a:pPr/>
-              <a:t>2020/7/18</a:t>
+              <a:t>2024/7/6</a:t>
             </a:fld>
             <a:endParaRPr lang="zh-TW" altLang="en-US"/>
           </a:p>
@@ -396,10 +397,9 @@
           <a:lstStyle/>
           <a:p>
             <a:r>
-              <a:rPr lang="zh-TW" altLang="en-US" smtClean="0"/>
+              <a:rPr lang="zh-TW" altLang="en-US"/>
               <a:t>按一下以編輯母片標題樣式</a:t>
             </a:r>
-            <a:endParaRPr lang="zh-TW" altLang="en-US"/>
           </a:p>
         </p:txBody>
       </p:sp>
@@ -420,38 +420,37 @@
           <a:p>
             <a:pPr lvl="0"/>
             <a:r>
-              <a:rPr lang="zh-TW" altLang="en-US" smtClean="0"/>
+              <a:rPr lang="zh-TW" altLang="en-US"/>
               <a:t>按一下以編輯母片文字樣式</a:t>
             </a:r>
           </a:p>
           <a:p>
             <a:pPr lvl="1"/>
             <a:r>
-              <a:rPr lang="zh-TW" altLang="en-US" smtClean="0"/>
+              <a:rPr lang="zh-TW" altLang="en-US"/>
               <a:t>第二層</a:t>
             </a:r>
           </a:p>
           <a:p>
             <a:pPr lvl="2"/>
             <a:r>
-              <a:rPr lang="zh-TW" altLang="en-US" smtClean="0"/>
+              <a:rPr lang="zh-TW" altLang="en-US"/>
               <a:t>第三層</a:t>
             </a:r>
           </a:p>
           <a:p>
             <a:pPr lvl="3"/>
             <a:r>
-              <a:rPr lang="zh-TW" altLang="en-US" smtClean="0"/>
+              <a:rPr lang="zh-TW" altLang="en-US"/>
               <a:t>第四層</a:t>
             </a:r>
           </a:p>
           <a:p>
             <a:pPr lvl="4"/>
             <a:r>
-              <a:rPr lang="zh-TW" altLang="en-US" smtClean="0"/>
+              <a:rPr lang="zh-TW" altLang="en-US"/>
               <a:t>第五層</a:t>
             </a:r>
-            <a:endParaRPr lang="zh-TW" altLang="en-US"/>
           </a:p>
         </p:txBody>
       </p:sp>
@@ -473,7 +472,7 @@
             <a:fld id="{34984126-158D-41CC-83FE-CADDC65CCDDB}" type="datetimeFigureOut">
               <a:rPr lang="zh-TW" altLang="en-US" smtClean="0"/>
               <a:pPr/>
-              <a:t>2020/7/18</a:t>
+              <a:t>2024/7/6</a:t>
             </a:fld>
             <a:endParaRPr lang="zh-TW" altLang="en-US"/>
           </a:p>
@@ -568,10 +567,9 @@
           <a:lstStyle/>
           <a:p>
             <a:r>
-              <a:rPr lang="zh-TW" altLang="en-US" smtClean="0"/>
+              <a:rPr lang="zh-TW" altLang="en-US"/>
               <a:t>按一下以編輯母片標題樣式</a:t>
             </a:r>
-            <a:endParaRPr lang="zh-TW" altLang="en-US"/>
           </a:p>
         </p:txBody>
       </p:sp>
@@ -597,38 +595,37 @@
           <a:p>
             <a:pPr lvl="0"/>
             <a:r>
-              <a:rPr lang="zh-TW" altLang="en-US" smtClean="0"/>
+              <a:rPr lang="zh-TW" altLang="en-US"/>
               <a:t>按一下以編輯母片文字樣式</a:t>
             </a:r>
           </a:p>
           <a:p>
             <a:pPr lvl="1"/>
             <a:r>
-              <a:rPr lang="zh-TW" altLang="en-US" smtClean="0"/>
+              <a:rPr lang="zh-TW" altLang="en-US"/>
               <a:t>第二層</a:t>
             </a:r>
           </a:p>
           <a:p>
             <a:pPr lvl="2"/>
             <a:r>
-              <a:rPr lang="zh-TW" altLang="en-US" smtClean="0"/>
+              <a:rPr lang="zh-TW" altLang="en-US"/>
               <a:t>第三層</a:t>
             </a:r>
           </a:p>
           <a:p>
             <a:pPr lvl="3"/>
             <a:r>
-              <a:rPr lang="zh-TW" altLang="en-US" smtClean="0"/>
+              <a:rPr lang="zh-TW" altLang="en-US"/>
               <a:t>第四層</a:t>
             </a:r>
           </a:p>
           <a:p>
             <a:pPr lvl="4"/>
             <a:r>
-              <a:rPr lang="zh-TW" altLang="en-US" smtClean="0"/>
+              <a:rPr lang="zh-TW" altLang="en-US"/>
               <a:t>第五層</a:t>
             </a:r>
-            <a:endParaRPr lang="zh-TW" altLang="en-US"/>
           </a:p>
         </p:txBody>
       </p:sp>
@@ -650,7 +647,7 @@
             <a:fld id="{34984126-158D-41CC-83FE-CADDC65CCDDB}" type="datetimeFigureOut">
               <a:rPr lang="zh-TW" altLang="en-US" smtClean="0"/>
               <a:pPr/>
-              <a:t>2020/7/18</a:t>
+              <a:t>2024/7/6</a:t>
             </a:fld>
             <a:endParaRPr lang="zh-TW" altLang="en-US"/>
           </a:p>
@@ -740,10 +737,9 @@
           <a:lstStyle/>
           <a:p>
             <a:r>
-              <a:rPr lang="zh-TW" altLang="en-US" smtClean="0"/>
+              <a:rPr lang="zh-TW" altLang="en-US"/>
               <a:t>按一下以編輯母片標題樣式</a:t>
             </a:r>
-            <a:endParaRPr lang="zh-TW" altLang="en-US"/>
           </a:p>
         </p:txBody>
       </p:sp>
@@ -764,38 +760,37 @@
           <a:p>
             <a:pPr lvl="0"/>
             <a:r>
-              <a:rPr lang="zh-TW" altLang="en-US" smtClean="0"/>
+              <a:rPr lang="zh-TW" altLang="en-US"/>
               <a:t>按一下以編輯母片文字樣式</a:t>
             </a:r>
           </a:p>
           <a:p>
             <a:pPr lvl="1"/>
             <a:r>
-              <a:rPr lang="zh-TW" altLang="en-US" smtClean="0"/>
+              <a:rPr lang="zh-TW" altLang="en-US"/>
               <a:t>第二層</a:t>
             </a:r>
           </a:p>
           <a:p>
             <a:pPr lvl="2"/>
             <a:r>
-              <a:rPr lang="zh-TW" altLang="en-US" smtClean="0"/>
+              <a:rPr lang="zh-TW" altLang="en-US"/>
               <a:t>第三層</a:t>
             </a:r>
           </a:p>
           <a:p>
             <a:pPr lvl="3"/>
             <a:r>
-              <a:rPr lang="zh-TW" altLang="en-US" smtClean="0"/>
+              <a:rPr lang="zh-TW" altLang="en-US"/>
               <a:t>第四層</a:t>
             </a:r>
           </a:p>
           <a:p>
             <a:pPr lvl="4"/>
             <a:r>
-              <a:rPr lang="zh-TW" altLang="en-US" smtClean="0"/>
+              <a:rPr lang="zh-TW" altLang="en-US"/>
               <a:t>第五層</a:t>
             </a:r>
-            <a:endParaRPr lang="zh-TW" altLang="en-US"/>
           </a:p>
         </p:txBody>
       </p:sp>
@@ -817,7 +812,7 @@
             <a:fld id="{34984126-158D-41CC-83FE-CADDC65CCDDB}" type="datetimeFigureOut">
               <a:rPr lang="zh-TW" altLang="en-US" smtClean="0"/>
               <a:pPr/>
-              <a:t>2020/7/18</a:t>
+              <a:t>2024/7/6</a:t>
             </a:fld>
             <a:endParaRPr lang="zh-TW" altLang="en-US"/>
           </a:p>
@@ -916,10 +911,9 @@
           </a:lstStyle>
           <a:p>
             <a:r>
-              <a:rPr lang="zh-TW" altLang="en-US" smtClean="0"/>
+              <a:rPr lang="zh-TW" altLang="en-US"/>
               <a:t>按一下以編輯母片標題樣式</a:t>
             </a:r>
-            <a:endParaRPr lang="zh-TW" altLang="en-US"/>
           </a:p>
         </p:txBody>
       </p:sp>
@@ -1036,7 +1030,7 @@
           <a:p>
             <a:pPr lvl="0"/>
             <a:r>
-              <a:rPr lang="zh-TW" altLang="en-US" smtClean="0"/>
+              <a:rPr lang="zh-TW" altLang="en-US"/>
               <a:t>按一下以編輯母片文字樣式</a:t>
             </a:r>
           </a:p>
@@ -1060,7 +1054,7 @@
             <a:fld id="{34984126-158D-41CC-83FE-CADDC65CCDDB}" type="datetimeFigureOut">
               <a:rPr lang="zh-TW" altLang="en-US" smtClean="0"/>
               <a:pPr/>
-              <a:t>2020/7/18</a:t>
+              <a:t>2024/7/6</a:t>
             </a:fld>
             <a:endParaRPr lang="zh-TW" altLang="en-US"/>
           </a:p>
@@ -1150,10 +1144,9 @@
           <a:lstStyle/>
           <a:p>
             <a:r>
-              <a:rPr lang="zh-TW" altLang="en-US" smtClean="0"/>
+              <a:rPr lang="zh-TW" altLang="en-US"/>
               <a:t>按一下以編輯母片標題樣式</a:t>
             </a:r>
-            <a:endParaRPr lang="zh-TW" altLang="en-US"/>
           </a:p>
         </p:txBody>
       </p:sp>
@@ -1207,38 +1200,37 @@
           <a:p>
             <a:pPr lvl="0"/>
             <a:r>
-              <a:rPr lang="zh-TW" altLang="en-US" smtClean="0"/>
+              <a:rPr lang="zh-TW" altLang="en-US"/>
               <a:t>按一下以編輯母片文字樣式</a:t>
             </a:r>
           </a:p>
           <a:p>
             <a:pPr lvl="1"/>
             <a:r>
-              <a:rPr lang="zh-TW" altLang="en-US" smtClean="0"/>
+              <a:rPr lang="zh-TW" altLang="en-US"/>
               <a:t>第二層</a:t>
             </a:r>
           </a:p>
           <a:p>
             <a:pPr lvl="2"/>
             <a:r>
-              <a:rPr lang="zh-TW" altLang="en-US" smtClean="0"/>
+              <a:rPr lang="zh-TW" altLang="en-US"/>
               <a:t>第三層</a:t>
             </a:r>
           </a:p>
           <a:p>
             <a:pPr lvl="3"/>
             <a:r>
-              <a:rPr lang="zh-TW" altLang="en-US" smtClean="0"/>
+              <a:rPr lang="zh-TW" altLang="en-US"/>
               <a:t>第四層</a:t>
             </a:r>
           </a:p>
           <a:p>
             <a:pPr lvl="4"/>
             <a:r>
-              <a:rPr lang="zh-TW" altLang="en-US" smtClean="0"/>
+              <a:rPr lang="zh-TW" altLang="en-US"/>
               <a:t>第五層</a:t>
             </a:r>
-            <a:endParaRPr lang="zh-TW" altLang="en-US"/>
           </a:p>
         </p:txBody>
       </p:sp>
@@ -1292,38 +1284,37 @@
           <a:p>
             <a:pPr lvl="0"/>
             <a:r>
-              <a:rPr lang="zh-TW" altLang="en-US" smtClean="0"/>
+              <a:rPr lang="zh-TW" altLang="en-US"/>
               <a:t>按一下以編輯母片文字樣式</a:t>
             </a:r>
           </a:p>
           <a:p>
             <a:pPr lvl="1"/>
             <a:r>
-              <a:rPr lang="zh-TW" altLang="en-US" smtClean="0"/>
+              <a:rPr lang="zh-TW" altLang="en-US"/>
               <a:t>第二層</a:t>
             </a:r>
           </a:p>
           <a:p>
             <a:pPr lvl="2"/>
             <a:r>
-              <a:rPr lang="zh-TW" altLang="en-US" smtClean="0"/>
+              <a:rPr lang="zh-TW" altLang="en-US"/>
               <a:t>第三層</a:t>
             </a:r>
           </a:p>
           <a:p>
             <a:pPr lvl="3"/>
             <a:r>
-              <a:rPr lang="zh-TW" altLang="en-US" smtClean="0"/>
+              <a:rPr lang="zh-TW" altLang="en-US"/>
               <a:t>第四層</a:t>
             </a:r>
           </a:p>
           <a:p>
             <a:pPr lvl="4"/>
             <a:r>
-              <a:rPr lang="zh-TW" altLang="en-US" smtClean="0"/>
+              <a:rPr lang="zh-TW" altLang="en-US"/>
               <a:t>第五層</a:t>
             </a:r>
-            <a:endParaRPr lang="zh-TW" altLang="en-US"/>
           </a:p>
         </p:txBody>
       </p:sp>
@@ -1345,7 +1336,7 @@
             <a:fld id="{34984126-158D-41CC-83FE-CADDC65CCDDB}" type="datetimeFigureOut">
               <a:rPr lang="zh-TW" altLang="en-US" smtClean="0"/>
               <a:pPr/>
-              <a:t>2020/7/18</a:t>
+              <a:t>2024/7/6</a:t>
             </a:fld>
             <a:endParaRPr lang="zh-TW" altLang="en-US"/>
           </a:p>
@@ -1439,10 +1430,9 @@
           </a:lstStyle>
           <a:p>
             <a:r>
-              <a:rPr lang="zh-TW" altLang="en-US" smtClean="0"/>
+              <a:rPr lang="zh-TW" altLang="en-US"/>
               <a:t>按一下以編輯母片標題樣式</a:t>
             </a:r>
-            <a:endParaRPr lang="zh-TW" altLang="en-US"/>
           </a:p>
         </p:txBody>
       </p:sp>
@@ -1505,7 +1495,7 @@
           <a:p>
             <a:pPr lvl="0"/>
             <a:r>
-              <a:rPr lang="zh-TW" altLang="en-US" smtClean="0"/>
+              <a:rPr lang="zh-TW" altLang="en-US"/>
               <a:t>按一下以編輯母片文字樣式</a:t>
             </a:r>
           </a:p>
@@ -1561,38 +1551,37 @@
           <a:p>
             <a:pPr lvl="0"/>
             <a:r>
-              <a:rPr lang="zh-TW" altLang="en-US" smtClean="0"/>
+              <a:rPr lang="zh-TW" altLang="en-US"/>
               <a:t>按一下以編輯母片文字樣式</a:t>
             </a:r>
           </a:p>
           <a:p>
             <a:pPr lvl="1"/>
             <a:r>
-              <a:rPr lang="zh-TW" altLang="en-US" smtClean="0"/>
+              <a:rPr lang="zh-TW" altLang="en-US"/>
               <a:t>第二層</a:t>
             </a:r>
           </a:p>
           <a:p>
             <a:pPr lvl="2"/>
             <a:r>
-              <a:rPr lang="zh-TW" altLang="en-US" smtClean="0"/>
+              <a:rPr lang="zh-TW" altLang="en-US"/>
               <a:t>第三層</a:t>
             </a:r>
           </a:p>
           <a:p>
             <a:pPr lvl="3"/>
             <a:r>
-              <a:rPr lang="zh-TW" altLang="en-US" smtClean="0"/>
+              <a:rPr lang="zh-TW" altLang="en-US"/>
               <a:t>第四層</a:t>
             </a:r>
           </a:p>
           <a:p>
             <a:pPr lvl="4"/>
             <a:r>
-              <a:rPr lang="zh-TW" altLang="en-US" smtClean="0"/>
+              <a:rPr lang="zh-TW" altLang="en-US"/>
               <a:t>第五層</a:t>
             </a:r>
-            <a:endParaRPr lang="zh-TW" altLang="en-US"/>
           </a:p>
         </p:txBody>
       </p:sp>
@@ -1655,7 +1644,7 @@
           <a:p>
             <a:pPr lvl="0"/>
             <a:r>
-              <a:rPr lang="zh-TW" altLang="en-US" smtClean="0"/>
+              <a:rPr lang="zh-TW" altLang="en-US"/>
               <a:t>按一下以編輯母片文字樣式</a:t>
             </a:r>
           </a:p>
@@ -1711,38 +1700,37 @@
           <a:p>
             <a:pPr lvl="0"/>
             <a:r>
-              <a:rPr lang="zh-TW" altLang="en-US" smtClean="0"/>
+              <a:rPr lang="zh-TW" altLang="en-US"/>
               <a:t>按一下以編輯母片文字樣式</a:t>
             </a:r>
           </a:p>
           <a:p>
             <a:pPr lvl="1"/>
             <a:r>
-              <a:rPr lang="zh-TW" altLang="en-US" smtClean="0"/>
+              <a:rPr lang="zh-TW" altLang="en-US"/>
               <a:t>第二層</a:t>
             </a:r>
           </a:p>
           <a:p>
             <a:pPr lvl="2"/>
             <a:r>
-              <a:rPr lang="zh-TW" altLang="en-US" smtClean="0"/>
+              <a:rPr lang="zh-TW" altLang="en-US"/>
               <a:t>第三層</a:t>
             </a:r>
           </a:p>
           <a:p>
             <a:pPr lvl="3"/>
             <a:r>
-              <a:rPr lang="zh-TW" altLang="en-US" smtClean="0"/>
+              <a:rPr lang="zh-TW" altLang="en-US"/>
               <a:t>第四層</a:t>
             </a:r>
           </a:p>
           <a:p>
             <a:pPr lvl="4"/>
             <a:r>
-              <a:rPr lang="zh-TW" altLang="en-US" smtClean="0"/>
+              <a:rPr lang="zh-TW" altLang="en-US"/>
               <a:t>第五層</a:t>
             </a:r>
-            <a:endParaRPr lang="zh-TW" altLang="en-US"/>
           </a:p>
         </p:txBody>
       </p:sp>
@@ -1764,7 +1752,7 @@
             <a:fld id="{34984126-158D-41CC-83FE-CADDC65CCDDB}" type="datetimeFigureOut">
               <a:rPr lang="zh-TW" altLang="en-US" smtClean="0"/>
               <a:pPr/>
-              <a:t>2020/7/18</a:t>
+              <a:t>2024/7/6</a:t>
             </a:fld>
             <a:endParaRPr lang="zh-TW" altLang="en-US"/>
           </a:p>
@@ -1854,10 +1842,9 @@
           <a:lstStyle/>
           <a:p>
             <a:r>
-              <a:rPr lang="zh-TW" altLang="en-US" smtClean="0"/>
+              <a:rPr lang="zh-TW" altLang="en-US"/>
               <a:t>按一下以編輯母片標題樣式</a:t>
             </a:r>
-            <a:endParaRPr lang="zh-TW" altLang="en-US"/>
           </a:p>
         </p:txBody>
       </p:sp>
@@ -1879,7 +1866,7 @@
             <a:fld id="{34984126-158D-41CC-83FE-CADDC65CCDDB}" type="datetimeFigureOut">
               <a:rPr lang="zh-TW" altLang="en-US" smtClean="0"/>
               <a:pPr/>
-              <a:t>2020/7/18</a:t>
+              <a:t>2024/7/6</a:t>
             </a:fld>
             <a:endParaRPr lang="zh-TW" altLang="en-US"/>
           </a:p>
@@ -1971,7 +1958,7 @@
             <a:fld id="{34984126-158D-41CC-83FE-CADDC65CCDDB}" type="datetimeFigureOut">
               <a:rPr lang="zh-TW" altLang="en-US" smtClean="0"/>
               <a:pPr/>
-              <a:t>2020/7/18</a:t>
+              <a:t>2024/7/6</a:t>
             </a:fld>
             <a:endParaRPr lang="zh-TW" altLang="en-US"/>
           </a:p>
@@ -2070,10 +2057,9 @@
           </a:lstStyle>
           <a:p>
             <a:r>
-              <a:rPr lang="zh-TW" altLang="en-US" smtClean="0"/>
+              <a:rPr lang="zh-TW" altLang="en-US"/>
               <a:t>按一下以編輯母片標題樣式</a:t>
             </a:r>
-            <a:endParaRPr lang="zh-TW" altLang="en-US"/>
           </a:p>
         </p:txBody>
       </p:sp>
@@ -2127,38 +2113,37 @@
           <a:p>
             <a:pPr lvl="0"/>
             <a:r>
-              <a:rPr lang="zh-TW" altLang="en-US" smtClean="0"/>
+              <a:rPr lang="zh-TW" altLang="en-US"/>
               <a:t>按一下以編輯母片文字樣式</a:t>
             </a:r>
           </a:p>
           <a:p>
             <a:pPr lvl="1"/>
             <a:r>
-              <a:rPr lang="zh-TW" altLang="en-US" smtClean="0"/>
+              <a:rPr lang="zh-TW" altLang="en-US"/>
               <a:t>第二層</a:t>
             </a:r>
           </a:p>
           <a:p>
             <a:pPr lvl="2"/>
             <a:r>
-              <a:rPr lang="zh-TW" altLang="en-US" smtClean="0"/>
+              <a:rPr lang="zh-TW" altLang="en-US"/>
               <a:t>第三層</a:t>
             </a:r>
           </a:p>
           <a:p>
             <a:pPr lvl="3"/>
             <a:r>
-              <a:rPr lang="zh-TW" altLang="en-US" smtClean="0"/>
+              <a:rPr lang="zh-TW" altLang="en-US"/>
               <a:t>第四層</a:t>
             </a:r>
           </a:p>
           <a:p>
             <a:pPr lvl="4"/>
             <a:r>
-              <a:rPr lang="zh-TW" altLang="en-US" smtClean="0"/>
+              <a:rPr lang="zh-TW" altLang="en-US"/>
               <a:t>第五層</a:t>
             </a:r>
-            <a:endParaRPr lang="zh-TW" altLang="en-US"/>
           </a:p>
         </p:txBody>
       </p:sp>
@@ -2221,7 +2206,7 @@
           <a:p>
             <a:pPr lvl="0"/>
             <a:r>
-              <a:rPr lang="zh-TW" altLang="en-US" smtClean="0"/>
+              <a:rPr lang="zh-TW" altLang="en-US"/>
               <a:t>按一下以編輯母片文字樣式</a:t>
             </a:r>
           </a:p>
@@ -2245,7 +2230,7 @@
             <a:fld id="{34984126-158D-41CC-83FE-CADDC65CCDDB}" type="datetimeFigureOut">
               <a:rPr lang="zh-TW" altLang="en-US" smtClean="0"/>
               <a:pPr/>
-              <a:t>2020/7/18</a:t>
+              <a:t>2024/7/6</a:t>
             </a:fld>
             <a:endParaRPr lang="zh-TW" altLang="en-US"/>
           </a:p>
@@ -2344,10 +2329,9 @@
           </a:lstStyle>
           <a:p>
             <a:r>
-              <a:rPr lang="zh-TW" altLang="en-US" smtClean="0"/>
+              <a:rPr lang="zh-TW" altLang="en-US"/>
               <a:t>按一下以編輯母片標題樣式</a:t>
             </a:r>
-            <a:endParaRPr lang="zh-TW" altLang="en-US"/>
           </a:p>
         </p:txBody>
       </p:sp>
@@ -2409,10 +2393,9 @@
           </a:lstStyle>
           <a:p>
             <a:r>
-              <a:rPr lang="zh-TW" altLang="en-US" smtClean="0"/>
+              <a:rPr lang="zh-TW" altLang="en-US"/>
               <a:t>按一下圖示以新增圖片</a:t>
             </a:r>
-            <a:endParaRPr lang="zh-TW" altLang="en-US"/>
           </a:p>
         </p:txBody>
       </p:sp>
@@ -2475,7 +2458,7 @@
           <a:p>
             <a:pPr lvl="0"/>
             <a:r>
-              <a:rPr lang="zh-TW" altLang="en-US" smtClean="0"/>
+              <a:rPr lang="zh-TW" altLang="en-US"/>
               <a:t>按一下以編輯母片文字樣式</a:t>
             </a:r>
           </a:p>
@@ -2499,7 +2482,7 @@
             <a:fld id="{34984126-158D-41CC-83FE-CADDC65CCDDB}" type="datetimeFigureOut">
               <a:rPr lang="zh-TW" altLang="en-US" smtClean="0"/>
               <a:pPr/>
-              <a:t>2020/7/18</a:t>
+              <a:t>2024/7/6</a:t>
             </a:fld>
             <a:endParaRPr lang="zh-TW" altLang="en-US"/>
           </a:p>
@@ -2609,10 +2592,9 @@
           <a:lstStyle/>
           <a:p>
             <a:r>
-              <a:rPr lang="zh-TW" altLang="en-US" smtClean="0"/>
+              <a:rPr lang="zh-TW" altLang="en-US"/>
               <a:t>按一下以編輯母片標題樣式</a:t>
             </a:r>
-            <a:endParaRPr lang="zh-TW" altLang="en-US"/>
           </a:p>
         </p:txBody>
       </p:sp>
@@ -2643,38 +2625,37 @@
           <a:p>
             <a:pPr lvl="0"/>
             <a:r>
-              <a:rPr lang="zh-TW" altLang="en-US" smtClean="0"/>
+              <a:rPr lang="zh-TW" altLang="en-US"/>
               <a:t>按一下以編輯母片文字樣式</a:t>
             </a:r>
           </a:p>
           <a:p>
             <a:pPr lvl="1"/>
             <a:r>
-              <a:rPr lang="zh-TW" altLang="en-US" smtClean="0"/>
+              <a:rPr lang="zh-TW" altLang="en-US"/>
               <a:t>第二層</a:t>
             </a:r>
           </a:p>
           <a:p>
             <a:pPr lvl="2"/>
             <a:r>
-              <a:rPr lang="zh-TW" altLang="en-US" smtClean="0"/>
+              <a:rPr lang="zh-TW" altLang="en-US"/>
               <a:t>第三層</a:t>
             </a:r>
           </a:p>
           <a:p>
             <a:pPr lvl="3"/>
             <a:r>
-              <a:rPr lang="zh-TW" altLang="en-US" smtClean="0"/>
+              <a:rPr lang="zh-TW" altLang="en-US"/>
               <a:t>第四層</a:t>
             </a:r>
           </a:p>
           <a:p>
             <a:pPr lvl="4"/>
             <a:r>
-              <a:rPr lang="zh-TW" altLang="en-US" smtClean="0"/>
+              <a:rPr lang="zh-TW" altLang="en-US"/>
               <a:t>第五層</a:t>
             </a:r>
-            <a:endParaRPr lang="zh-TW" altLang="en-US"/>
           </a:p>
         </p:txBody>
       </p:sp>
@@ -2714,7 +2695,7 @@
             <a:fld id="{34984126-158D-41CC-83FE-CADDC65CCDDB}" type="datetimeFigureOut">
               <a:rPr lang="zh-TW" altLang="en-US" smtClean="0"/>
               <a:pPr/>
-              <a:t>2020/7/18</a:t>
+              <a:t>2024/7/6</a:t>
             </a:fld>
             <a:endParaRPr lang="zh-TW" altLang="en-US"/>
           </a:p>
@@ -3087,7 +3068,7 @@
       </p:grpSpPr>
       <p:sp>
         <p:nvSpPr>
-          <p:cNvPr id="2" name="標題 1"/>
+          <p:cNvPr id="4" name="標題 3"/>
           <p:cNvSpPr>
             <a:spLocks noGrp="1"/>
           </p:cNvSpPr>
@@ -3095,299 +3076,69 @@
             <p:ph type="title"/>
           </p:nvPr>
         </p:nvSpPr>
-        <p:spPr/>
+        <p:spPr>
+          <a:xfrm>
+            <a:off x="0" y="2660915"/>
+            <a:ext cx="12192000" cy="1143000"/>
+          </a:xfrm>
+        </p:spPr>
         <p:txBody>
           <a:bodyPr>
-            <a:normAutofit/>
+            <a:noAutofit/>
           </a:bodyPr>
           <a:lstStyle/>
           <a:p>
             <a:r>
-              <a:rPr lang="zh-TW" altLang="en-US" sz="4800" b="1" dirty="0">
+              <a:rPr lang="zh-TW" altLang="en-US" sz="7200" b="1" i="1" dirty="0">
                 <a:solidFill>
                   <a:srgbClr val="000066"/>
                 </a:solidFill>
+                <a:effectLst>
+                  <a:outerShdw blurRad="38100" dist="38100" dir="2700000" algn="tl">
+                    <a:srgbClr val="000000">
+                      <a:alpha val="43137"/>
+                    </a:srgbClr>
+                  </a:outerShdw>
+                </a:effectLst>
                 <a:latin typeface="微軟正黑體" pitchFamily="34" charset="-120"/>
                 <a:ea typeface="微軟正黑體" pitchFamily="34" charset="-120"/>
               </a:rPr>
-              <a:t>我</a:t>
-            </a:r>
-            <a:r>
-              <a:rPr lang="zh-TW" altLang="en-US" sz="4800" b="1" dirty="0" smtClean="0">
+              <a:t>我對</a:t>
+            </a:r>
+            <a:r>
+              <a:rPr lang="zh-CN" altLang="en-US" sz="7200" b="1" i="1" dirty="0">
                 <a:solidFill>
                   <a:srgbClr val="000066"/>
                 </a:solidFill>
+                <a:effectLst>
+                  <a:outerShdw blurRad="38100" dist="38100" dir="2700000" algn="tl">
+                    <a:srgbClr val="000000">
+                      <a:alpha val="43137"/>
+                    </a:srgbClr>
+                  </a:outerShdw>
+                </a:effectLst>
                 <a:latin typeface="微軟正黑體" pitchFamily="34" charset="-120"/>
                 <a:ea typeface="微軟正黑體" pitchFamily="34" charset="-120"/>
               </a:rPr>
-              <a:t>對</a:t>
-            </a:r>
-            <a:r>
-              <a:rPr lang="zh-CN" altLang="en-US" sz="4800" b="1" dirty="0" smtClean="0">
+              <a:t>祢</a:t>
+            </a:r>
+            <a:r>
+              <a:rPr lang="zh-TW" altLang="en-US" sz="7200" b="1" i="1" dirty="0">
                 <a:solidFill>
                   <a:srgbClr val="000066"/>
                 </a:solidFill>
+                <a:effectLst>
+                  <a:outerShdw blurRad="38100" dist="38100" dir="2700000" algn="tl">
+                    <a:srgbClr val="000000">
+                      <a:alpha val="43137"/>
+                    </a:srgbClr>
+                  </a:outerShdw>
+                </a:effectLst>
                 <a:latin typeface="微軟正黑體" pitchFamily="34" charset="-120"/>
                 <a:ea typeface="微軟正黑體" pitchFamily="34" charset="-120"/>
               </a:rPr>
-              <a:t>袮</a:t>
-            </a:r>
-            <a:r>
-              <a:rPr lang="zh-TW" altLang="en-US" sz="4800" b="1" dirty="0" smtClean="0">
-                <a:solidFill>
-                  <a:srgbClr val="000066"/>
-                </a:solidFill>
-                <a:latin typeface="微軟正黑體" pitchFamily="34" charset="-120"/>
-                <a:ea typeface="微軟正黑體" pitchFamily="34" charset="-120"/>
-              </a:rPr>
-              <a:t>的</a:t>
-            </a:r>
-            <a:r>
-              <a:rPr lang="zh-TW" altLang="en-US" sz="4800" b="1" dirty="0">
-                <a:solidFill>
-                  <a:srgbClr val="000066"/>
-                </a:solidFill>
-                <a:latin typeface="微軟正黑體" pitchFamily="34" charset="-120"/>
-                <a:ea typeface="微軟正黑體" pitchFamily="34" charset="-120"/>
-              </a:rPr>
-              <a:t>愛永不變</a:t>
-            </a:r>
-          </a:p>
-        </p:txBody>
-      </p:sp>
-      <p:sp>
-        <p:nvSpPr>
-          <p:cNvPr id="3" name="內容版面配置區 2"/>
-          <p:cNvSpPr>
-            <a:spLocks noGrp="1"/>
-          </p:cNvSpPr>
-          <p:nvPr>
-            <p:ph idx="1"/>
-          </p:nvPr>
-        </p:nvSpPr>
-        <p:spPr/>
-        <p:txBody>
-          <a:bodyPr>
-            <a:normAutofit/>
-          </a:bodyPr>
-          <a:lstStyle/>
-          <a:p>
-            <a:pPr algn="ctr">
-              <a:buNone/>
-            </a:pPr>
-            <a:r>
-              <a:rPr lang="zh-CN" altLang="en-US" sz="5400" b="1" dirty="0">
-                <a:solidFill>
-                  <a:srgbClr val="000066"/>
-                </a:solidFill>
-                <a:latin typeface="微軟正黑體" pitchFamily="34" charset="-120"/>
-                <a:ea typeface="微軟正黑體" pitchFamily="34" charset="-120"/>
-              </a:rPr>
-              <a:t>袮</a:t>
-            </a:r>
-            <a:r>
-              <a:rPr lang="zh-TW" altLang="en-US" sz="5400" b="1" dirty="0" smtClean="0">
-                <a:solidFill>
-                  <a:srgbClr val="000066"/>
-                </a:solidFill>
-                <a:latin typeface="微軟正黑體" pitchFamily="34" charset="-120"/>
-                <a:ea typeface="微軟正黑體" pitchFamily="34" charset="-120"/>
-              </a:rPr>
-              <a:t>開</a:t>
-            </a:r>
-            <a:r>
-              <a:rPr lang="zh-TW" altLang="en-US" sz="5400" b="1" dirty="0">
-                <a:solidFill>
-                  <a:srgbClr val="000066"/>
-                </a:solidFill>
-                <a:latin typeface="微軟正黑體" pitchFamily="34" charset="-120"/>
-                <a:ea typeface="微軟正黑體" pitchFamily="34" charset="-120"/>
-              </a:rPr>
-              <a:t>了我的耳我的</a:t>
-            </a:r>
-            <a:r>
-              <a:rPr lang="zh-TW" altLang="en-US" sz="5400" b="1" dirty="0">
-                <a:solidFill>
-                  <a:srgbClr val="000066"/>
-                </a:solidFill>
-                <a:latin typeface="微軟正黑體" pitchFamily="34" charset="-120"/>
-                <a:ea typeface="微軟正黑體" pitchFamily="34" charset="-120"/>
-              </a:rPr>
-              <a:t>眼</a:t>
-            </a:r>
-            <a:endParaRPr lang="en-US" altLang="zh-TW" sz="5400" b="1" dirty="0">
-              <a:solidFill>
-                <a:srgbClr val="000066"/>
-              </a:solidFill>
-              <a:latin typeface="微軟正黑體" pitchFamily="34" charset="-120"/>
-              <a:ea typeface="微軟正黑體" pitchFamily="34" charset="-120"/>
-            </a:endParaRPr>
-          </a:p>
-          <a:p>
-            <a:pPr algn="ctr">
-              <a:buNone/>
-            </a:pPr>
-            <a:r>
-              <a:rPr lang="zh-TW" altLang="en-US" sz="5400" b="1" dirty="0">
-                <a:solidFill>
-                  <a:srgbClr val="000066"/>
-                </a:solidFill>
-                <a:latin typeface="微軟正黑體" pitchFamily="34" charset="-120"/>
-                <a:ea typeface="微軟正黑體" pitchFamily="34" charset="-120"/>
-              </a:rPr>
-              <a:t>我</a:t>
-            </a:r>
-            <a:r>
-              <a:rPr lang="zh-TW" altLang="en-US" sz="5400" b="1" dirty="0">
-                <a:solidFill>
-                  <a:srgbClr val="000066"/>
-                </a:solidFill>
-                <a:latin typeface="微軟正黑體" pitchFamily="34" charset="-120"/>
-                <a:ea typeface="微軟正黑體" pitchFamily="34" charset="-120"/>
-              </a:rPr>
-              <a:t>的嘴將稱</a:t>
-            </a:r>
-            <a:r>
-              <a:rPr lang="zh-TW" altLang="en-US" sz="5400" b="1" dirty="0" smtClean="0">
-                <a:solidFill>
-                  <a:srgbClr val="000066"/>
-                </a:solidFill>
-                <a:latin typeface="微軟正黑體" pitchFamily="34" charset="-120"/>
-                <a:ea typeface="微軟正黑體" pitchFamily="34" charset="-120"/>
-              </a:rPr>
-              <a:t>頌</a:t>
-            </a:r>
-            <a:r>
-              <a:rPr lang="zh-CN" altLang="en-US" sz="5400" b="1" dirty="0">
-                <a:solidFill>
-                  <a:srgbClr val="000066"/>
-                </a:solidFill>
-                <a:latin typeface="微軟正黑體" pitchFamily="34" charset="-120"/>
-                <a:ea typeface="微軟正黑體" pitchFamily="34" charset="-120"/>
-              </a:rPr>
-              <a:t>袮</a:t>
-            </a:r>
-            <a:r>
-              <a:rPr lang="zh-TW" altLang="en-US" sz="5400" b="1" dirty="0" smtClean="0">
-                <a:solidFill>
-                  <a:srgbClr val="000066"/>
-                </a:solidFill>
-                <a:latin typeface="微軟正黑體" pitchFamily="34" charset="-120"/>
-                <a:ea typeface="微軟正黑體" pitchFamily="34" charset="-120"/>
-              </a:rPr>
-              <a:t>到</a:t>
-            </a:r>
-            <a:r>
-              <a:rPr lang="zh-TW" altLang="en-US" sz="5400" b="1" dirty="0">
-                <a:solidFill>
-                  <a:srgbClr val="000066"/>
-                </a:solidFill>
-                <a:latin typeface="微軟正黑體" pitchFamily="34" charset="-120"/>
-                <a:ea typeface="微軟正黑體" pitchFamily="34" charset="-120"/>
-              </a:rPr>
-              <a:t>永遠</a:t>
-            </a:r>
-            <a:endParaRPr lang="en-US" altLang="zh-TW" sz="5400" b="1" dirty="0">
-              <a:solidFill>
-                <a:srgbClr val="000066"/>
-              </a:solidFill>
-              <a:latin typeface="微軟正黑體" pitchFamily="34" charset="-120"/>
-              <a:ea typeface="微軟正黑體" pitchFamily="34" charset="-120"/>
-            </a:endParaRPr>
-          </a:p>
-          <a:p>
-            <a:pPr algn="ctr">
-              <a:buNone/>
-            </a:pPr>
-            <a:r>
-              <a:rPr lang="zh-CN" altLang="en-US" sz="5400" b="1" dirty="0">
-                <a:solidFill>
-                  <a:srgbClr val="000066"/>
-                </a:solidFill>
-                <a:latin typeface="微軟正黑體" pitchFamily="34" charset="-120"/>
-                <a:ea typeface="微軟正黑體" pitchFamily="34" charset="-120"/>
-              </a:rPr>
-              <a:t>袮</a:t>
-            </a:r>
-            <a:r>
-              <a:rPr lang="zh-TW" altLang="en-US" sz="5400" b="1" dirty="0" smtClean="0">
-                <a:solidFill>
-                  <a:srgbClr val="000066"/>
-                </a:solidFill>
-                <a:latin typeface="微軟正黑體" pitchFamily="34" charset="-120"/>
-                <a:ea typeface="微軟正黑體" pitchFamily="34" charset="-120"/>
-              </a:rPr>
-              <a:t>的</a:t>
-            </a:r>
-            <a:r>
-              <a:rPr lang="zh-TW" altLang="en-US" sz="5400" b="1" dirty="0">
-                <a:solidFill>
-                  <a:srgbClr val="000066"/>
-                </a:solidFill>
-                <a:latin typeface="微軟正黑體" pitchFamily="34" charset="-120"/>
-                <a:ea typeface="微軟正黑體" pitchFamily="34" charset="-120"/>
-              </a:rPr>
-              <a:t>意念高過我的</a:t>
-            </a:r>
-            <a:r>
-              <a:rPr lang="zh-TW" altLang="en-US" sz="5400" b="1" dirty="0">
-                <a:solidFill>
-                  <a:srgbClr val="000066"/>
-                </a:solidFill>
-                <a:latin typeface="微軟正黑體" pitchFamily="34" charset="-120"/>
-                <a:ea typeface="微軟正黑體" pitchFamily="34" charset="-120"/>
-              </a:rPr>
-              <a:t>思想</a:t>
-            </a:r>
-            <a:endParaRPr lang="en-US" altLang="zh-TW" sz="5400" b="1" dirty="0">
-              <a:solidFill>
-                <a:srgbClr val="000066"/>
-              </a:solidFill>
-              <a:latin typeface="微軟正黑體" pitchFamily="34" charset="-120"/>
-              <a:ea typeface="微軟正黑體" pitchFamily="34" charset="-120"/>
-            </a:endParaRPr>
-          </a:p>
-          <a:p>
-            <a:pPr algn="ctr">
-              <a:buNone/>
-            </a:pPr>
-            <a:r>
-              <a:rPr lang="zh-TW" altLang="en-US" sz="5400" b="1" dirty="0">
-                <a:solidFill>
-                  <a:srgbClr val="000066"/>
-                </a:solidFill>
-                <a:latin typeface="微軟正黑體" pitchFamily="34" charset="-120"/>
-                <a:ea typeface="微軟正黑體" pitchFamily="34" charset="-120"/>
-              </a:rPr>
-              <a:t>如同</a:t>
-            </a:r>
-            <a:r>
-              <a:rPr lang="zh-TW" altLang="en-US" sz="5400" b="1" dirty="0">
-                <a:solidFill>
-                  <a:srgbClr val="000066"/>
-                </a:solidFill>
-                <a:latin typeface="微軟正黑體" pitchFamily="34" charset="-120"/>
-                <a:ea typeface="微軟正黑體" pitchFamily="34" charset="-120"/>
-              </a:rPr>
-              <a:t>天高過</a:t>
-            </a:r>
-            <a:r>
-              <a:rPr lang="zh-TW" altLang="en-US" sz="5400" b="1" dirty="0">
-                <a:solidFill>
-                  <a:srgbClr val="000066"/>
-                </a:solidFill>
-                <a:latin typeface="微軟正黑體" pitchFamily="34" charset="-120"/>
-                <a:ea typeface="微軟正黑體" pitchFamily="34" charset="-120"/>
-              </a:rPr>
-              <a:t>地</a:t>
-            </a:r>
-            <a:endParaRPr lang="zh-TW" altLang="en-US" sz="5400" b="1" dirty="0">
-              <a:solidFill>
-                <a:srgbClr val="000066"/>
-              </a:solidFill>
-              <a:latin typeface="微軟正黑體" pitchFamily="34" charset="-120"/>
-              <a:ea typeface="微軟正黑體" pitchFamily="34" charset="-120"/>
-            </a:endParaRPr>
+              <a:t>的愛永不變</a:t>
+            </a:r>
           </a:p>
         </p:txBody>
       </p:sp>
@@ -3418,125 +3169,50 @@
       </p:grpSpPr>
       <p:sp>
         <p:nvSpPr>
-          <p:cNvPr id="2" name="標題 1"/>
-          <p:cNvSpPr>
-            <a:spLocks noGrp="1"/>
-          </p:cNvSpPr>
-          <p:nvPr>
-            <p:ph type="title"/>
-          </p:nvPr>
-        </p:nvSpPr>
-        <p:spPr/>
-        <p:txBody>
-          <a:bodyPr>
+          <p:cNvPr id="5" name="內容版面配置區 4"/>
+          <p:cNvSpPr>
+            <a:spLocks noGrp="1"/>
+          </p:cNvSpPr>
+          <p:nvPr>
+            <p:ph idx="1"/>
+          </p:nvPr>
+        </p:nvSpPr>
+        <p:spPr>
+          <a:xfrm>
+            <a:off x="0" y="2084851"/>
+            <a:ext cx="12192000" cy="2404863"/>
+          </a:xfrm>
+        </p:spPr>
+        <p:txBody>
+          <a:bodyPr anchor="ctr">
             <a:normAutofit/>
           </a:bodyPr>
           <a:lstStyle/>
           <a:p>
-            <a:r>
-              <a:rPr lang="zh-TW" altLang="en-US" sz="4800" b="1" dirty="0">
+            <a:pPr algn="ctr">
+              <a:buNone/>
+            </a:pPr>
+            <a:r>
+              <a:rPr lang="zh-CN" altLang="en-US" sz="6400" b="1" dirty="0">
                 <a:solidFill>
                   <a:srgbClr val="000066"/>
                 </a:solidFill>
                 <a:latin typeface="微軟正黑體" pitchFamily="34" charset="-120"/>
                 <a:ea typeface="微軟正黑體" pitchFamily="34" charset="-120"/>
               </a:rPr>
-              <a:t>我</a:t>
-            </a:r>
-            <a:r>
-              <a:rPr lang="zh-TW" altLang="en-US" sz="4800" b="1" dirty="0" smtClean="0">
+              <a:t>祢</a:t>
+            </a:r>
+            <a:r>
+              <a:rPr lang="zh-TW" altLang="en-US" sz="6400" b="1" dirty="0">
                 <a:solidFill>
                   <a:srgbClr val="000066"/>
                 </a:solidFill>
                 <a:latin typeface="微軟正黑體" pitchFamily="34" charset="-120"/>
                 <a:ea typeface="微軟正黑體" pitchFamily="34" charset="-120"/>
               </a:rPr>
-              <a:t>對</a:t>
-            </a:r>
-            <a:r>
-              <a:rPr lang="zh-CN" altLang="en-US" sz="4800" b="1" dirty="0">
-                <a:solidFill>
-                  <a:srgbClr val="000066"/>
-                </a:solidFill>
-                <a:latin typeface="微軟正黑體" pitchFamily="34" charset="-120"/>
-                <a:ea typeface="微軟正黑體" pitchFamily="34" charset="-120"/>
-              </a:rPr>
-              <a:t>袮</a:t>
-            </a:r>
-            <a:r>
-              <a:rPr lang="zh-TW" altLang="en-US" sz="4800" b="1" dirty="0" smtClean="0">
-                <a:solidFill>
-                  <a:srgbClr val="000066"/>
-                </a:solidFill>
-                <a:latin typeface="微軟正黑體" pitchFamily="34" charset="-120"/>
-                <a:ea typeface="微軟正黑體" pitchFamily="34" charset="-120"/>
-              </a:rPr>
-              <a:t>的</a:t>
-            </a:r>
-            <a:r>
-              <a:rPr lang="zh-TW" altLang="en-US" sz="4800" b="1" dirty="0">
-                <a:solidFill>
-                  <a:srgbClr val="000066"/>
-                </a:solidFill>
-                <a:latin typeface="微軟正黑體" pitchFamily="34" charset="-120"/>
-                <a:ea typeface="微軟正黑體" pitchFamily="34" charset="-120"/>
-              </a:rPr>
-              <a:t>愛永不變</a:t>
-            </a:r>
-          </a:p>
-        </p:txBody>
-      </p:sp>
-      <p:sp>
-        <p:nvSpPr>
-          <p:cNvPr id="3" name="內容版面配置區 2"/>
-          <p:cNvSpPr>
-            <a:spLocks noGrp="1"/>
-          </p:cNvSpPr>
-          <p:nvPr>
-            <p:ph idx="1"/>
-          </p:nvPr>
-        </p:nvSpPr>
-        <p:spPr/>
-        <p:txBody>
-          <a:bodyPr>
-            <a:normAutofit/>
-          </a:bodyPr>
-          <a:lstStyle/>
-          <a:p>
-            <a:pPr algn="ctr">
-              <a:buNone/>
-            </a:pPr>
-            <a:r>
-              <a:rPr lang="zh-TW" altLang="en-US" sz="5400" b="1" dirty="0">
-                <a:solidFill>
-                  <a:srgbClr val="000066"/>
-                </a:solidFill>
-                <a:latin typeface="微軟正黑體" pitchFamily="34" charset="-120"/>
-                <a:ea typeface="微軟正黑體" pitchFamily="34" charset="-120"/>
-              </a:rPr>
-              <a:t>全地都要來讚</a:t>
-            </a:r>
-            <a:r>
-              <a:rPr lang="zh-TW" altLang="en-US" sz="5400" b="1" dirty="0" smtClean="0">
-                <a:solidFill>
-                  <a:srgbClr val="000066"/>
-                </a:solidFill>
-                <a:latin typeface="微軟正黑體" pitchFamily="34" charset="-120"/>
-                <a:ea typeface="微軟正黑體" pitchFamily="34" charset="-120"/>
-              </a:rPr>
-              <a:t>美</a:t>
-            </a:r>
-            <a:r>
-              <a:rPr lang="zh-CN" altLang="en-US" sz="5400" b="1" dirty="0">
-                <a:solidFill>
-                  <a:srgbClr val="000066"/>
-                </a:solidFill>
-                <a:latin typeface="微軟正黑體" pitchFamily="34" charset="-120"/>
-                <a:ea typeface="微軟正黑體" pitchFamily="34" charset="-120"/>
-              </a:rPr>
-              <a:t>袮</a:t>
-            </a:r>
-            <a:endParaRPr lang="en-US" altLang="zh-TW" sz="5400" b="1" dirty="0">
+              <a:t>開了我的耳我的眼</a:t>
+            </a:r>
+            <a:endParaRPr lang="en-US" altLang="zh-TW" sz="6400" b="1" dirty="0">
               <a:solidFill>
                 <a:srgbClr val="000066"/>
               </a:solidFill>
@@ -3549,76 +3225,36 @@
               <a:buNone/>
             </a:pPr>
             <a:r>
-              <a:rPr lang="zh-TW" altLang="en-US" sz="5400" b="1" dirty="0">
+              <a:rPr lang="zh-TW" altLang="en-US" sz="6400" b="1" dirty="0">
                 <a:solidFill>
                   <a:srgbClr val="000066"/>
                 </a:solidFill>
                 <a:latin typeface="微軟正黑體" pitchFamily="34" charset="-120"/>
                 <a:ea typeface="微軟正黑體" pitchFamily="34" charset="-120"/>
               </a:rPr>
-              <a:t>我跪</a:t>
-            </a:r>
-            <a:r>
-              <a:rPr lang="zh-TW" altLang="en-US" sz="5400" b="1" dirty="0" smtClean="0">
+              <a:t>我的嘴將稱頌</a:t>
+            </a:r>
+            <a:r>
+              <a:rPr lang="zh-CN" altLang="en-US" sz="6400" b="1" dirty="0">
                 <a:solidFill>
                   <a:srgbClr val="000066"/>
                 </a:solidFill>
                 <a:latin typeface="微軟正黑體" pitchFamily="34" charset="-120"/>
                 <a:ea typeface="微軟正黑體" pitchFamily="34" charset="-120"/>
               </a:rPr>
-              <a:t>拜</a:t>
-            </a:r>
-            <a:r>
-              <a:rPr lang="zh-CN" altLang="en-US" sz="5400" b="1" dirty="0">
+              <a:t>祢</a:t>
+            </a:r>
+            <a:r>
+              <a:rPr lang="zh-TW" altLang="en-US" sz="6400" b="1" dirty="0">
                 <a:solidFill>
                   <a:srgbClr val="000066"/>
                 </a:solidFill>
                 <a:latin typeface="微軟正黑體" pitchFamily="34" charset="-120"/>
                 <a:ea typeface="微軟正黑體" pitchFamily="34" charset="-120"/>
               </a:rPr>
-              <a:t>袮</a:t>
-            </a:r>
-            <a:r>
-              <a:rPr lang="zh-TW" altLang="en-US" sz="5400" b="1" dirty="0" smtClean="0">
-                <a:solidFill>
-                  <a:srgbClr val="000066"/>
-                </a:solidFill>
-                <a:latin typeface="微軟正黑體" pitchFamily="34" charset="-120"/>
-                <a:ea typeface="微軟正黑體" pitchFamily="34" charset="-120"/>
-              </a:rPr>
-              <a:t>面</a:t>
-            </a:r>
-            <a:r>
-              <a:rPr lang="zh-TW" altLang="en-US" sz="5400" b="1" dirty="0">
-                <a:solidFill>
-                  <a:srgbClr val="000066"/>
-                </a:solidFill>
-                <a:latin typeface="微軟正黑體" pitchFamily="34" charset="-120"/>
-                <a:ea typeface="微軟正黑體" pitchFamily="34" charset="-120"/>
-              </a:rPr>
-              <a:t>前稱</a:t>
-            </a:r>
-            <a:r>
-              <a:rPr lang="zh-TW" altLang="en-US" sz="5400" b="1" dirty="0" smtClean="0">
-                <a:solidFill>
-                  <a:srgbClr val="000066"/>
-                </a:solidFill>
-                <a:latin typeface="微軟正黑體" pitchFamily="34" charset="-120"/>
-                <a:ea typeface="微軟正黑體" pitchFamily="34" charset="-120"/>
-              </a:rPr>
-              <a:t>頌</a:t>
-            </a:r>
-            <a:r>
-              <a:rPr lang="zh-CN" altLang="en-US" sz="5400" b="1" dirty="0">
-                <a:solidFill>
-                  <a:srgbClr val="000066"/>
-                </a:solidFill>
-                <a:latin typeface="微軟正黑體" pitchFamily="34" charset="-120"/>
-                <a:ea typeface="微軟正黑體" pitchFamily="34" charset="-120"/>
-              </a:rPr>
-              <a:t>袮</a:t>
-            </a:r>
-            <a:endParaRPr lang="en-US" altLang="zh-TW" sz="5400" b="1" dirty="0">
+              <a:t>到永遠</a:t>
+            </a:r>
+            <a:endParaRPr lang="en-US" altLang="zh-TW" sz="6400" b="1" dirty="0">
               <a:solidFill>
                 <a:srgbClr val="000066"/>
               </a:solidFill>
@@ -3626,21 +3262,141 @@
               <a:ea typeface="微軟正黑體" pitchFamily="34" charset="-120"/>
             </a:endParaRPr>
           </a:p>
+        </p:txBody>
+      </p:sp>
+      <p:sp>
+        <p:nvSpPr>
+          <p:cNvPr id="3" name="TextBox 2"/>
+          <p:cNvSpPr txBox="1"/>
+          <p:nvPr/>
+        </p:nvSpPr>
+        <p:spPr>
+          <a:xfrm>
+            <a:off x="0" y="5157193"/>
+            <a:ext cx="12192000" cy="584775"/>
+          </a:xfrm>
+          <a:prstGeom prst="rect">
+            <a:avLst/>
+          </a:prstGeom>
+          <a:noFill/>
+        </p:spPr>
+        <p:txBody>
+          <a:bodyPr wrap="square" rtlCol="0">
+            <a:spAutoFit/>
+          </a:bodyPr>
+          <a:lstStyle/>
+          <a:p>
+            <a:pPr algn="ctr"/>
+            <a:r>
+              <a:rPr lang="en-US" sz="3200" b="1" dirty="0">
+                <a:solidFill>
+                  <a:srgbClr val="000066"/>
+                </a:solidFill>
+                <a:latin typeface="Microsoft JhengHei" panose="020B0604030504040204" pitchFamily="34" charset="-120"/>
+                <a:ea typeface="Microsoft JhengHei" panose="020B0604030504040204" pitchFamily="34" charset="-120"/>
+              </a:rPr>
+              <a:t>( </a:t>
+            </a:r>
+            <a:r>
+              <a:rPr lang="zh-CN" altLang="en-US" sz="3200" b="1" dirty="0">
+                <a:solidFill>
+                  <a:srgbClr val="000066"/>
+                </a:solidFill>
+                <a:latin typeface="Microsoft JhengHei" panose="020B0604030504040204" pitchFamily="34" charset="-120"/>
+                <a:ea typeface="Microsoft JhengHei" panose="020B0604030504040204" pitchFamily="34" charset="-120"/>
+              </a:rPr>
+              <a:t>正歌</a:t>
+            </a:r>
+            <a:r>
+              <a:rPr lang="en-US" sz="3200" b="1" dirty="0">
+                <a:solidFill>
+                  <a:srgbClr val="000066"/>
+                </a:solidFill>
+                <a:latin typeface="Microsoft JhengHei" panose="020B0604030504040204" pitchFamily="34" charset="-120"/>
+                <a:ea typeface="Microsoft JhengHei" panose="020B0604030504040204" pitchFamily="34" charset="-120"/>
+              </a:rPr>
+              <a:t> )</a:t>
+            </a:r>
+            <a:endParaRPr lang="vi-VN" sz="3200" b="1" dirty="0">
+              <a:solidFill>
+                <a:srgbClr val="000066"/>
+              </a:solidFill>
+              <a:ea typeface="Microsoft JhengHei" panose="020B0604030504040204" pitchFamily="34" charset="-120"/>
+            </a:endParaRPr>
+          </a:p>
+        </p:txBody>
+      </p:sp>
+    </p:spTree>
+  </p:cSld>
+  <p:clrMapOvr>
+    <a:masterClrMapping/>
+  </p:clrMapOvr>
+</p:sld>
+</file>
+
+<file path=ppt/slides/slide3.xml><?xml version="1.0" encoding="utf-8"?>
+<p:sld xmlns:a="http://schemas.openxmlformats.org/drawingml/2006/main" xmlns:r="http://schemas.openxmlformats.org/officeDocument/2006/relationships" xmlns:p="http://schemas.openxmlformats.org/presentationml/2006/main">
+  <p:cSld>
+    <p:spTree>
+      <p:nvGrpSpPr>
+        <p:cNvPr id="1" name=""/>
+        <p:cNvGrpSpPr/>
+        <p:nvPr/>
+      </p:nvGrpSpPr>
+      <p:grpSpPr>
+        <a:xfrm>
+          <a:off x="0" y="0"/>
+          <a:ext cx="0" cy="0"/>
+          <a:chOff x="0" y="0"/>
+          <a:chExt cx="0" cy="0"/>
+        </a:xfrm>
+      </p:grpSpPr>
+      <p:sp>
+        <p:nvSpPr>
+          <p:cNvPr id="5" name="內容版面配置區 4"/>
+          <p:cNvSpPr>
+            <a:spLocks noGrp="1"/>
+          </p:cNvSpPr>
+          <p:nvPr>
+            <p:ph idx="1"/>
+          </p:nvPr>
+        </p:nvSpPr>
+        <p:spPr>
+          <a:xfrm>
+            <a:off x="0" y="2084851"/>
+            <a:ext cx="12192000" cy="2404863"/>
+          </a:xfrm>
+        </p:spPr>
+        <p:txBody>
+          <a:bodyPr anchor="ctr">
+            <a:normAutofit/>
+          </a:bodyPr>
+          <a:lstStyle/>
           <a:p>
             <a:pPr algn="ctr">
               <a:buNone/>
             </a:pPr>
             <a:r>
-              <a:rPr lang="zh-TW" altLang="en-US" sz="5400" b="1" dirty="0">
+              <a:rPr lang="zh-CN" altLang="en-US" sz="6400" b="1" dirty="0">
                 <a:solidFill>
                   <a:srgbClr val="000066"/>
                 </a:solidFill>
                 <a:latin typeface="微軟正黑體" pitchFamily="34" charset="-120"/>
                 <a:ea typeface="微軟正黑體" pitchFamily="34" charset="-120"/>
               </a:rPr>
-              <a:t>山雖動搖   地雖改變</a:t>
-            </a:r>
-            <a:endParaRPr lang="en-US" altLang="zh-TW" sz="5400" b="1" dirty="0">
+              <a:t>祢</a:t>
+            </a:r>
+            <a:r>
+              <a:rPr lang="zh-TW" altLang="en-US" sz="6400" b="1" dirty="0">
+                <a:solidFill>
+                  <a:srgbClr val="000066"/>
+                </a:solidFill>
+                <a:latin typeface="微軟正黑體" pitchFamily="34" charset="-120"/>
+                <a:ea typeface="微軟正黑體" pitchFamily="34" charset="-120"/>
+              </a:rPr>
+              <a:t>的意念高過我的思想</a:t>
+            </a:r>
+            <a:endParaRPr lang="en-US" altLang="zh-TW" sz="6400" b="1" dirty="0">
               <a:solidFill>
                 <a:srgbClr val="000066"/>
               </a:solidFill>
@@ -3653,59 +3409,457 @@
               <a:buNone/>
             </a:pPr>
             <a:r>
-              <a:rPr lang="zh-TW" altLang="en-US" sz="5400" b="1" dirty="0">
+              <a:rPr lang="zh-TW" altLang="en-US" sz="6400" b="1" dirty="0">
                 <a:solidFill>
                   <a:srgbClr val="000066"/>
                 </a:solidFill>
                 <a:latin typeface="微軟正黑體" pitchFamily="34" charset="-120"/>
                 <a:ea typeface="微軟正黑體" pitchFamily="34" charset="-120"/>
               </a:rPr>
-              <a:t>我</a:t>
-            </a:r>
-            <a:r>
-              <a:rPr lang="zh-TW" altLang="en-US" sz="5400" b="1" dirty="0" smtClean="0">
+              <a:t>如同天高過地</a:t>
+            </a:r>
+          </a:p>
+        </p:txBody>
+      </p:sp>
+      <p:sp>
+        <p:nvSpPr>
+          <p:cNvPr id="3" name="TextBox 2"/>
+          <p:cNvSpPr txBox="1"/>
+          <p:nvPr/>
+        </p:nvSpPr>
+        <p:spPr>
+          <a:xfrm>
+            <a:off x="0" y="5157193"/>
+            <a:ext cx="12192000" cy="584775"/>
+          </a:xfrm>
+          <a:prstGeom prst="rect">
+            <a:avLst/>
+          </a:prstGeom>
+          <a:noFill/>
+        </p:spPr>
+        <p:txBody>
+          <a:bodyPr wrap="square" rtlCol="0">
+            <a:spAutoFit/>
+          </a:bodyPr>
+          <a:lstStyle/>
+          <a:p>
+            <a:pPr algn="ctr"/>
+            <a:r>
+              <a:rPr lang="en-US" sz="3200" b="1" dirty="0">
+                <a:solidFill>
+                  <a:srgbClr val="000066"/>
+                </a:solidFill>
+                <a:latin typeface="Microsoft JhengHei" panose="020B0604030504040204" pitchFamily="34" charset="-120"/>
+                <a:ea typeface="Microsoft JhengHei" panose="020B0604030504040204" pitchFamily="34" charset="-120"/>
+              </a:rPr>
+              <a:t>( </a:t>
+            </a:r>
+            <a:r>
+              <a:rPr lang="zh-CN" altLang="en-US" sz="3200" b="1" dirty="0">
+                <a:solidFill>
+                  <a:srgbClr val="000066"/>
+                </a:solidFill>
+                <a:latin typeface="Microsoft JhengHei" panose="020B0604030504040204" pitchFamily="34" charset="-120"/>
+                <a:ea typeface="Microsoft JhengHei" panose="020B0604030504040204" pitchFamily="34" charset="-120"/>
+              </a:rPr>
+              <a:t>正歌</a:t>
+            </a:r>
+            <a:r>
+              <a:rPr lang="en-US" sz="3200" b="1" dirty="0">
+                <a:solidFill>
+                  <a:srgbClr val="000066"/>
+                </a:solidFill>
+                <a:latin typeface="Microsoft JhengHei" panose="020B0604030504040204" pitchFamily="34" charset="-120"/>
+                <a:ea typeface="Microsoft JhengHei" panose="020B0604030504040204" pitchFamily="34" charset="-120"/>
+              </a:rPr>
+              <a:t> )</a:t>
+            </a:r>
+            <a:endParaRPr lang="vi-VN" sz="3200" b="1" dirty="0">
+              <a:solidFill>
+                <a:srgbClr val="000066"/>
+              </a:solidFill>
+              <a:ea typeface="Microsoft JhengHei" panose="020B0604030504040204" pitchFamily="34" charset="-120"/>
+            </a:endParaRPr>
+          </a:p>
+        </p:txBody>
+      </p:sp>
+    </p:spTree>
+    <p:extLst>
+      <p:ext uri="{BB962C8B-B14F-4D97-AF65-F5344CB8AC3E}">
+        <p14:creationId xmlns:p14="http://schemas.microsoft.com/office/powerpoint/2010/main" val="3031110119"/>
+      </p:ext>
+    </p:extLst>
+  </p:cSld>
+  <p:clrMapOvr>
+    <a:masterClrMapping/>
+  </p:clrMapOvr>
+</p:sld>
+</file>
+
+<file path=ppt/slides/slide4.xml><?xml version="1.0" encoding="utf-8"?>
+<p:sld xmlns:a="http://schemas.openxmlformats.org/drawingml/2006/main" xmlns:r="http://schemas.openxmlformats.org/officeDocument/2006/relationships" xmlns:p="http://schemas.openxmlformats.org/presentationml/2006/main">
+  <p:cSld>
+    <p:spTree>
+      <p:nvGrpSpPr>
+        <p:cNvPr id="1" name=""/>
+        <p:cNvGrpSpPr/>
+        <p:nvPr/>
+      </p:nvGrpSpPr>
+      <p:grpSpPr>
+        <a:xfrm>
+          <a:off x="0" y="0"/>
+          <a:ext cx="0" cy="0"/>
+          <a:chOff x="0" y="0"/>
+          <a:chExt cx="0" cy="0"/>
+        </a:xfrm>
+      </p:grpSpPr>
+      <p:sp>
+        <p:nvSpPr>
+          <p:cNvPr id="5" name="內容版面配置區 4"/>
+          <p:cNvSpPr>
+            <a:spLocks noGrp="1"/>
+          </p:cNvSpPr>
+          <p:nvPr>
+            <p:ph idx="1"/>
+          </p:nvPr>
+        </p:nvSpPr>
+        <p:spPr>
+          <a:xfrm>
+            <a:off x="0" y="2084851"/>
+            <a:ext cx="12192000" cy="2404863"/>
+          </a:xfrm>
+        </p:spPr>
+        <p:txBody>
+          <a:bodyPr anchor="ctr">
+            <a:normAutofit/>
+          </a:bodyPr>
+          <a:lstStyle/>
+          <a:p>
+            <a:pPr algn="ctr">
+              <a:buNone/>
+            </a:pPr>
+            <a:r>
+              <a:rPr lang="zh-TW" altLang="en-US" sz="6400" b="1" dirty="0">
                 <a:solidFill>
                   <a:srgbClr val="000066"/>
                 </a:solidFill>
                 <a:latin typeface="微軟正黑體" pitchFamily="34" charset="-120"/>
                 <a:ea typeface="微軟正黑體" pitchFamily="34" charset="-120"/>
               </a:rPr>
-              <a:t>對</a:t>
-            </a:r>
-            <a:r>
-              <a:rPr lang="zh-CN" altLang="en-US" sz="5400" b="1" dirty="0">
+              <a:t>全地都要來讚美</a:t>
+            </a:r>
+            <a:r>
+              <a:rPr lang="zh-CN" altLang="en-US" sz="6400" b="1" dirty="0">
                 <a:solidFill>
                   <a:srgbClr val="000066"/>
                 </a:solidFill>
                 <a:latin typeface="微軟正黑體" pitchFamily="34" charset="-120"/>
                 <a:ea typeface="微軟正黑體" pitchFamily="34" charset="-120"/>
               </a:rPr>
-              <a:t>袮</a:t>
-            </a:r>
-            <a:r>
-              <a:rPr lang="zh-TW" altLang="en-US" sz="5400" b="1" dirty="0" smtClean="0">
+              <a:t>祢</a:t>
+            </a:r>
+            <a:endParaRPr lang="en-US" altLang="zh-TW" sz="6400" b="1" dirty="0">
+              <a:solidFill>
+                <a:srgbClr val="000066"/>
+              </a:solidFill>
+              <a:latin typeface="微軟正黑體" pitchFamily="34" charset="-120"/>
+              <a:ea typeface="微軟正黑體" pitchFamily="34" charset="-120"/>
+            </a:endParaRPr>
+          </a:p>
+          <a:p>
+            <a:pPr algn="ctr">
+              <a:buNone/>
+            </a:pPr>
+            <a:r>
+              <a:rPr lang="zh-TW" altLang="en-US" sz="6400" b="1" dirty="0">
                 <a:solidFill>
                   <a:srgbClr val="000066"/>
                 </a:solidFill>
                 <a:latin typeface="微軟正黑體" pitchFamily="34" charset="-120"/>
                 <a:ea typeface="微軟正黑體" pitchFamily="34" charset="-120"/>
               </a:rPr>
-              <a:t>的</a:t>
-            </a:r>
-            <a:r>
-              <a:rPr lang="zh-TW" altLang="en-US" sz="5400" b="1" dirty="0">
+              <a:t>我跪拜</a:t>
+            </a:r>
+            <a:r>
+              <a:rPr lang="zh-CN" altLang="en-US" sz="6400" b="1" dirty="0">
                 <a:solidFill>
                   <a:srgbClr val="000066"/>
                 </a:solidFill>
                 <a:latin typeface="微軟正黑體" pitchFamily="34" charset="-120"/>
                 <a:ea typeface="微軟正黑體" pitchFamily="34" charset="-120"/>
               </a:rPr>
-              <a:t>愛永不變</a:t>
-            </a:r>
+              <a:t>祢</a:t>
+            </a:r>
+            <a:r>
+              <a:rPr lang="zh-TW" altLang="en-US" sz="6400" b="1" dirty="0">
+                <a:solidFill>
+                  <a:srgbClr val="000066"/>
+                </a:solidFill>
+                <a:latin typeface="微軟正黑體" pitchFamily="34" charset="-120"/>
+                <a:ea typeface="微軟正黑體" pitchFamily="34" charset="-120"/>
+              </a:rPr>
+              <a:t>面前稱頌</a:t>
+            </a:r>
+            <a:r>
+              <a:rPr lang="zh-CN" altLang="en-US" sz="6400" b="1" dirty="0">
+                <a:solidFill>
+                  <a:srgbClr val="000066"/>
+                </a:solidFill>
+                <a:latin typeface="微軟正黑體" pitchFamily="34" charset="-120"/>
+                <a:ea typeface="微軟正黑體" pitchFamily="34" charset="-120"/>
+              </a:rPr>
+              <a:t>祢</a:t>
+            </a:r>
+            <a:endParaRPr lang="en-US" altLang="zh-TW" sz="6400" b="1" dirty="0">
+              <a:solidFill>
+                <a:srgbClr val="000066"/>
+              </a:solidFill>
+              <a:latin typeface="微軟正黑體" pitchFamily="34" charset="-120"/>
+              <a:ea typeface="微軟正黑體" pitchFamily="34" charset="-120"/>
+            </a:endParaRPr>
+          </a:p>
+        </p:txBody>
+      </p:sp>
+      <p:sp>
+        <p:nvSpPr>
+          <p:cNvPr id="3" name="TextBox 2"/>
+          <p:cNvSpPr txBox="1"/>
+          <p:nvPr/>
+        </p:nvSpPr>
+        <p:spPr>
+          <a:xfrm>
+            <a:off x="0" y="5157193"/>
+            <a:ext cx="12192000" cy="584775"/>
+          </a:xfrm>
+          <a:prstGeom prst="rect">
+            <a:avLst/>
+          </a:prstGeom>
+          <a:noFill/>
+        </p:spPr>
+        <p:txBody>
+          <a:bodyPr wrap="square" rtlCol="0">
+            <a:spAutoFit/>
+          </a:bodyPr>
+          <a:lstStyle/>
+          <a:p>
+            <a:pPr algn="ctr"/>
+            <a:r>
+              <a:rPr lang="en-US" sz="3200" b="1" dirty="0">
+                <a:solidFill>
+                  <a:srgbClr val="000066"/>
+                </a:solidFill>
+                <a:latin typeface="Microsoft JhengHei" panose="020B0604030504040204" pitchFamily="34" charset="-120"/>
+                <a:ea typeface="Microsoft JhengHei" panose="020B0604030504040204" pitchFamily="34" charset="-120"/>
+              </a:rPr>
+              <a:t>( </a:t>
+            </a:r>
+            <a:r>
+              <a:rPr lang="zh-CN" altLang="en-US" sz="3200" b="1" dirty="0">
+                <a:solidFill>
+                  <a:srgbClr val="000066"/>
+                </a:solidFill>
+                <a:latin typeface="Microsoft JhengHei" panose="020B0604030504040204" pitchFamily="34" charset="-120"/>
+                <a:ea typeface="Microsoft JhengHei" panose="020B0604030504040204" pitchFamily="34" charset="-120"/>
+              </a:rPr>
+              <a:t>副歌</a:t>
+            </a:r>
+            <a:r>
+              <a:rPr lang="en-US" sz="3200" b="1" dirty="0">
+                <a:solidFill>
+                  <a:srgbClr val="000066"/>
+                </a:solidFill>
+                <a:latin typeface="Microsoft JhengHei" panose="020B0604030504040204" pitchFamily="34" charset="-120"/>
+                <a:ea typeface="Microsoft JhengHei" panose="020B0604030504040204" pitchFamily="34" charset="-120"/>
+              </a:rPr>
+              <a:t> )</a:t>
+            </a:r>
+            <a:endParaRPr lang="vi-VN" sz="3200" b="1" dirty="0">
+              <a:solidFill>
+                <a:srgbClr val="000066"/>
+              </a:solidFill>
+              <a:ea typeface="Microsoft JhengHei" panose="020B0604030504040204" pitchFamily="34" charset="-120"/>
+            </a:endParaRPr>
           </a:p>
         </p:txBody>
       </p:sp>
     </p:spTree>
+    <p:extLst>
+      <p:ext uri="{BB962C8B-B14F-4D97-AF65-F5344CB8AC3E}">
+        <p14:creationId xmlns:p14="http://schemas.microsoft.com/office/powerpoint/2010/main" val="2934780633"/>
+      </p:ext>
+    </p:extLst>
+  </p:cSld>
+  <p:clrMapOvr>
+    <a:masterClrMapping/>
+  </p:clrMapOvr>
+</p:sld>
+</file>
+
+<file path=ppt/slides/slide5.xml><?xml version="1.0" encoding="utf-8"?>
+<p:sld xmlns:a="http://schemas.openxmlformats.org/drawingml/2006/main" xmlns:r="http://schemas.openxmlformats.org/officeDocument/2006/relationships" xmlns:p="http://schemas.openxmlformats.org/presentationml/2006/main">
+  <p:cSld>
+    <p:spTree>
+      <p:nvGrpSpPr>
+        <p:cNvPr id="1" name=""/>
+        <p:cNvGrpSpPr/>
+        <p:nvPr/>
+      </p:nvGrpSpPr>
+      <p:grpSpPr>
+        <a:xfrm>
+          <a:off x="0" y="0"/>
+          <a:ext cx="0" cy="0"/>
+          <a:chOff x="0" y="0"/>
+          <a:chExt cx="0" cy="0"/>
+        </a:xfrm>
+      </p:grpSpPr>
+      <p:sp>
+        <p:nvSpPr>
+          <p:cNvPr id="5" name="內容版面配置區 4"/>
+          <p:cNvSpPr>
+            <a:spLocks noGrp="1"/>
+          </p:cNvSpPr>
+          <p:nvPr>
+            <p:ph idx="1"/>
+          </p:nvPr>
+        </p:nvSpPr>
+        <p:spPr>
+          <a:xfrm>
+            <a:off x="0" y="2084851"/>
+            <a:ext cx="12192000" cy="2404863"/>
+          </a:xfrm>
+        </p:spPr>
+        <p:txBody>
+          <a:bodyPr anchor="ctr">
+            <a:normAutofit/>
+          </a:bodyPr>
+          <a:lstStyle/>
+          <a:p>
+            <a:pPr algn="ctr">
+              <a:buNone/>
+            </a:pPr>
+            <a:r>
+              <a:rPr lang="zh-TW" altLang="en-US" sz="6400" b="1" dirty="0">
+                <a:solidFill>
+                  <a:srgbClr val="000066"/>
+                </a:solidFill>
+                <a:latin typeface="微軟正黑體" pitchFamily="34" charset="-120"/>
+                <a:ea typeface="微軟正黑體" pitchFamily="34" charset="-120"/>
+              </a:rPr>
+              <a:t>山雖動搖   地雖改變</a:t>
+            </a:r>
+            <a:endParaRPr lang="en-US" altLang="zh-TW" sz="6400" b="1" dirty="0">
+              <a:solidFill>
+                <a:srgbClr val="000066"/>
+              </a:solidFill>
+              <a:latin typeface="微軟正黑體" pitchFamily="34" charset="-120"/>
+              <a:ea typeface="微軟正黑體" pitchFamily="34" charset="-120"/>
+            </a:endParaRPr>
+          </a:p>
+          <a:p>
+            <a:pPr algn="ctr">
+              <a:buNone/>
+            </a:pPr>
+            <a:r>
+              <a:rPr lang="zh-TW" altLang="en-US" sz="6400" b="1" dirty="0">
+                <a:solidFill>
+                  <a:srgbClr val="000066"/>
+                </a:solidFill>
+                <a:latin typeface="微軟正黑體" pitchFamily="34" charset="-120"/>
+                <a:ea typeface="微軟正黑體" pitchFamily="34" charset="-120"/>
+              </a:rPr>
+              <a:t>我對</a:t>
+            </a:r>
+            <a:r>
+              <a:rPr lang="zh-CN" altLang="en-US" sz="6400" b="1" dirty="0">
+                <a:solidFill>
+                  <a:srgbClr val="000066"/>
+                </a:solidFill>
+                <a:latin typeface="微軟正黑體" pitchFamily="34" charset="-120"/>
+                <a:ea typeface="微軟正黑體" pitchFamily="34" charset="-120"/>
+              </a:rPr>
+              <a:t>祢</a:t>
+            </a:r>
+            <a:r>
+              <a:rPr lang="zh-TW" altLang="en-US" sz="6400" b="1" dirty="0">
+                <a:solidFill>
+                  <a:srgbClr val="000066"/>
+                </a:solidFill>
+                <a:latin typeface="微軟正黑體" pitchFamily="34" charset="-120"/>
+                <a:ea typeface="微軟正黑體" pitchFamily="34" charset="-120"/>
+              </a:rPr>
+              <a:t>的愛永不變</a:t>
+            </a:r>
+          </a:p>
+        </p:txBody>
+      </p:sp>
+      <p:sp>
+        <p:nvSpPr>
+          <p:cNvPr id="3" name="TextBox 2"/>
+          <p:cNvSpPr txBox="1"/>
+          <p:nvPr/>
+        </p:nvSpPr>
+        <p:spPr>
+          <a:xfrm>
+            <a:off x="0" y="5157193"/>
+            <a:ext cx="12192000" cy="584775"/>
+          </a:xfrm>
+          <a:prstGeom prst="rect">
+            <a:avLst/>
+          </a:prstGeom>
+          <a:noFill/>
+        </p:spPr>
+        <p:txBody>
+          <a:bodyPr wrap="square" rtlCol="0">
+            <a:spAutoFit/>
+          </a:bodyPr>
+          <a:lstStyle/>
+          <a:p>
+            <a:pPr algn="ctr"/>
+            <a:r>
+              <a:rPr lang="en-US" sz="3200" b="1" dirty="0">
+                <a:solidFill>
+                  <a:srgbClr val="000066"/>
+                </a:solidFill>
+                <a:latin typeface="Microsoft JhengHei" panose="020B0604030504040204" pitchFamily="34" charset="-120"/>
+                <a:ea typeface="Microsoft JhengHei" panose="020B0604030504040204" pitchFamily="34" charset="-120"/>
+              </a:rPr>
+              <a:t>( </a:t>
+            </a:r>
+            <a:r>
+              <a:rPr lang="zh-CN" altLang="en-US" sz="3200" b="1" dirty="0">
+                <a:solidFill>
+                  <a:srgbClr val="000066"/>
+                </a:solidFill>
+                <a:latin typeface="Microsoft JhengHei" panose="020B0604030504040204" pitchFamily="34" charset="-120"/>
+                <a:ea typeface="Microsoft JhengHei" panose="020B0604030504040204" pitchFamily="34" charset="-120"/>
+              </a:rPr>
+              <a:t>副歌</a:t>
+            </a:r>
+            <a:r>
+              <a:rPr lang="en-US" sz="3200" b="1" dirty="0">
+                <a:solidFill>
+                  <a:srgbClr val="000066"/>
+                </a:solidFill>
+                <a:latin typeface="Microsoft JhengHei" panose="020B0604030504040204" pitchFamily="34" charset="-120"/>
+                <a:ea typeface="Microsoft JhengHei" panose="020B0604030504040204" pitchFamily="34" charset="-120"/>
+              </a:rPr>
+              <a:t> )</a:t>
+            </a:r>
+            <a:endParaRPr lang="vi-VN" sz="3200" b="1" dirty="0">
+              <a:solidFill>
+                <a:srgbClr val="000066"/>
+              </a:solidFill>
+              <a:ea typeface="Microsoft JhengHei" panose="020B0604030504040204" pitchFamily="34" charset="-120"/>
+            </a:endParaRPr>
+          </a:p>
+        </p:txBody>
+      </p:sp>
+    </p:spTree>
+    <p:extLst>
+      <p:ext uri="{BB962C8B-B14F-4D97-AF65-F5344CB8AC3E}">
+        <p14:creationId xmlns:p14="http://schemas.microsoft.com/office/powerpoint/2010/main" val="1989168451"/>
+      </p:ext>
+    </p:extLst>
   </p:cSld>
   <p:clrMapOvr>
     <a:masterClrMapping/>
